--- a/curso/pptx/S72.pptx
+++ b/curso/pptx/S72.pptx
@@ -7129,7 +7129,7 @@
                 </a:solidFill>
                 <a:latin typeface="Nunito Sans"/>
               </a:rPr>
-              <a:t>Viene del latín </a:t>
+              <a:t>来自拉丁语 </a:t>
             </a:r>
             <a:r>
               <a:rPr sz="2800" b="1">
@@ -7147,7 +7147,7 @@
                 </a:solidFill>
                 <a:latin typeface="Nunito Sans"/>
               </a:rPr>
-              <a:t>: «lo mismo»</a:t>
+              <a:t>：“相同”</a:t>
             </a:r>
           </a:p>
           <a:p>
@@ -7172,7 +7172,7 @@
                 </a:solidFill>
                 <a:latin typeface="Nunito Sans"/>
               </a:rPr>
-              <a:t>Tiene una parte que </a:t>
+              <a:t>它有一部分</a:t>
             </a:r>
             <a:r>
               <a:rPr sz="2800" b="1">
@@ -7181,7 +7181,7 @@
                 </a:solidFill>
                 <a:latin typeface="Nunito Sans"/>
               </a:rPr>
-              <a:t>sigue</a:t>
+              <a:t>不变</a:t>
             </a:r>
             <a:r>
               <a:rPr sz="2800" b="0">
@@ -7190,7 +7190,7 @@
                 </a:solidFill>
                 <a:latin typeface="Nunito Sans"/>
               </a:rPr>
-              <a:t> y otra que </a:t>
+              <a:t>，也有一部分在</a:t>
             </a:r>
             <a:r>
               <a:rPr sz="2800" b="1">
@@ -7199,7 +7199,7 @@
                 </a:solidFill>
                 <a:latin typeface="Nunito Sans"/>
               </a:rPr>
-              <a:t>cambia</a:t>
+              <a:t>变化</a:t>
             </a:r>
           </a:p>
           <a:p>
@@ -7224,7 +7224,7 @@
                 </a:solidFill>
                 <a:latin typeface="Nunito Sans"/>
               </a:rPr>
-              <a:t>Nadie tiene una identidad igual a la de otro</a:t>
+              <a:t>没有人的身份认同和另一个人完全一样</a:t>
             </a:r>
           </a:p>
         </p:txBody>
@@ -8104,7 +8104,7 @@
                 </a:solidFill>
                 <a:latin typeface="Nunito Sans"/>
               </a:rPr>
-              <a:t>No elegimos:</a:t>
+              <a:t>不能选择：</a:t>
             </a:r>
             <a:r>
               <a:rPr sz="2800" b="0">
@@ -8113,7 +8113,7 @@
                 </a:solidFill>
                 <a:latin typeface="Nunito Sans"/>
               </a:rPr>
-              <a:t> la familia, el cuerpo, el lugar donde nacimos</a:t>
+              <a:t>家庭、身体、出生的地方</a:t>
             </a:r>
           </a:p>
           <a:p>
@@ -8138,7 +8138,7 @@
                 </a:solidFill>
                 <a:latin typeface="Nunito Sans"/>
               </a:rPr>
-              <a:t>Elegimos en parte:</a:t>
+              <a:t>部分能选择：</a:t>
             </a:r>
             <a:r>
               <a:rPr sz="2800" b="0">
@@ -8147,7 +8147,7 @@
                 </a:solidFill>
                 <a:latin typeface="Nunito Sans"/>
               </a:rPr>
-              <a:t> amigos, aficiones, cómo tratamos a los demás</a:t>
+              <a:t>朋友、兴趣爱好、我们怎么对待别人</a:t>
             </a:r>
           </a:p>
           <a:p>
@@ -8172,7 +8172,7 @@
                 </a:solidFill>
                 <a:latin typeface="Nunito Sans"/>
               </a:rPr>
-              <a:t>Casi todo es </a:t>
+              <a:t>几乎所有东西都是</a:t>
             </a:r>
             <a:r>
               <a:rPr sz="2800" b="1">
@@ -8181,7 +8181,7 @@
                 </a:solidFill>
                 <a:latin typeface="Nunito Sans"/>
               </a:rPr>
-              <a:t>mezcla</a:t>
+              <a:t>混合</a:t>
             </a:r>
             <a:r>
               <a:rPr sz="2800" b="0">
@@ -8190,7 +8190,7 @@
                 </a:solidFill>
                 <a:latin typeface="Nunito Sans"/>
               </a:rPr>
-              <a:t>: lo que nos toca y lo que hacemos con ello</a:t>
+              <a:t>：落到我们头上的，和我们用它去做的</a:t>
             </a:r>
           </a:p>
         </p:txBody>

--- a/curso/pptx/S72.pptx
+++ b/curso/pptx/S72.pptx
@@ -4151,7 +4151,7 @@
                 </a:solidFill>
                 <a:latin typeface="Fredoka"/>
               </a:rPr>
-              <a:t>案例1 · 奈亚拉的卡片</a:t>
+              <a:t>案例1 · 一个女孩的卡片</a:t>
             </a:r>
           </a:p>
         </p:txBody>
@@ -4233,7 +4233,7 @@
                 </a:solidFill>
                 <a:latin typeface="Nunito Sans"/>
               </a:rPr>
-              <a:t>奈亚拉在一张卡片上写道：“13岁。毕尔巴鄂。我弹特里基蒂克萨。我很喜欢读书。我很害羞。”她的身份认同里出现了哪些因素？（编造的例子。）</a:t>
+              <a:t>一个女孩在一张卡片上写道：“13岁。毕尔巴鄂。我弹特里基蒂克萨。我很喜欢读书。我很害羞。”她的身份认同里出现了哪些因素？（编造的例子。）</a:t>
             </a:r>
           </a:p>
         </p:txBody>
@@ -4356,7 +4356,7 @@
                 </a:solidFill>
                 <a:latin typeface="Nunito Sans"/>
               </a:rPr>
-              <a:t>结论：五条信息给了我们一些关于奈亚拉的线索，但她远不止她的卡片。</a:t>
+              <a:t>结论：五条信息给了我们一些关于这个女孩的线索，但她远不止她的卡片。</a:t>
             </a:r>
           </a:p>
         </p:txBody>
@@ -4542,7 +4542,7 @@
                 </a:solidFill>
                 <a:latin typeface="Nunito Sans"/>
               </a:rPr>
-              <a:t>伊克尔数学考试没及格。那天下午他说：“我数学不好。我就是这样的，我不会改变。”</a:t>
+              <a:t>一个男孩数学考试没及格。那天下午他说：“我数学不好。我就是这样的，我不会改变。”</a:t>
             </a:r>
           </a:p>
         </p:txBody>
@@ -4590,7 +4590,7 @@
                 </a:solidFill>
                 <a:latin typeface="Nunito Sans"/>
               </a:rPr>
-              <a:t>你怎么知道？伊克尔只有一次考试。</a:t>
+              <a:t>你怎么知道？这个男孩只有一次考试。</a:t>
             </a:r>
           </a:p>
           <a:p>
@@ -4869,7 +4869,7 @@
                 </a:solidFill>
                 <a:latin typeface="Nunito Sans"/>
               </a:rPr>
-              <a:t>在班上，所有人都叫迪伦“搞笑大王”。有一天他来了，神情严肃，一言不发。他们对他说：“你怎么了？你不是这样的。”</a:t>
+              <a:t>在班上，所有人都叫一个男孩“搞笑大王”。有一天他来了，神情严肃，一言不发。他们对他说：“你怎么了？你不是这样的。”</a:t>
             </a:r>
           </a:p>
         </p:txBody>
@@ -4976,7 +4976,7 @@
                 </a:solidFill>
                 <a:latin typeface="Nunito Sans"/>
               </a:rPr>
-              <a:t>迪伦也可以难过，可以害怕，也可以认真地说话。</a:t>
+              <a:t>这个男孩也可以难过，可以害怕，也可以认真地说话。</a:t>
             </a:r>
           </a:p>
           <a:p>
@@ -5187,7 +5187,7 @@
                 </a:solidFill>
                 <a:latin typeface="Nunito Sans"/>
               </a:rPr>
-              <a:t>蕾尔说：“我最喜欢的音乐是我自己自由选择的。没有人影响过我。”</a:t>
+              <a:t>一个女孩说：“我最喜欢的音乐是我自己自由选择的。没有人影响过我。”</a:t>
             </a:r>
           </a:p>
         </p:txBody>
